--- a/Planning docs/Slides/lesson-11-3-teacher-slides.pptx
+++ b/Planning docs/Slides/lesson-11-3-teacher-slides.pptx
@@ -5014,7 +5014,7 @@
                 <a:ea typeface="Calibri" pitchFamily="34" charset="-122"/>
                 <a:cs typeface="Calibri" pitchFamily="34" charset="-120"/>
               </a:rPr>
-              <a:t>•  What caused Despereaux to end up where he is now?</a:t>
+              <a:t>•  All three characters are in the dungeon. How does each one behave? Does anything surprise you?</a:t>
             </a:r>
             <a:endParaRPr lang="en-US" sz="1500" dirty="0"/>
           </a:p>
@@ -5031,24 +5031,7 @@
                 <a:ea typeface="Calibri" pitchFamily="34" charset="-122"/>
                 <a:cs typeface="Calibri" pitchFamily="34" charset="-120"/>
               </a:rPr>
-              <a:t>•  What caused Roscuro to feel the way he does?</a:t>
-            </a:r>
-            <a:endParaRPr lang="en-US" sz="1500" dirty="0"/>
-          </a:p>
-          <a:p>
-            <a:pPr indent="0" marL="0">
-              <a:buNone/>
-            </a:pPr>
-            <a:r>
-              <a:rPr lang="en-US" sz="1500" dirty="0">
-                <a:solidFill>
-                  <a:srgbClr val="1E293B"/>
-                </a:solidFill>
-                <a:latin typeface="Calibri" pitchFamily="34" charset="0"/>
-                <a:ea typeface="Calibri" pitchFamily="34" charset="-122"/>
-                <a:cs typeface="Calibri" pitchFamily="34" charset="-120"/>
-              </a:rPr>
-              <a:t>•  What might happen next as a result?</a:t>
+              <a:t>•  The author brings the threads together. What is the exact moment when everything shifts?</a:t>
             </a:r>
             <a:endParaRPr lang="en-US" sz="1500" dirty="0"/>
           </a:p>
